--- a/activity/M02A08/M02A08.pptx
+++ b/activity/M02A08/M02A08.pptx
@@ -216,7 +216,7 @@
             <a:fld id="{53CE91DE-ABC6-4D22-89A0-1765B629FB43}" type="datetimeFigureOut">
               <a:rPr lang="es-CO" smtClean="0"/>
               <a:pPr/>
-              <a:t>23/11/2021</a:t>
+              <a:t>31/07/2025</a:t>
             </a:fld>
             <a:endParaRPr lang="es-CO"/>
           </a:p>
@@ -669,7 +669,7 @@
             <a:fld id="{43DF08CB-A55A-40B1-AEFD-F19B3CFD19B5}" type="datetimeFigureOut">
               <a:rPr lang="es-CO" smtClean="0"/>
               <a:pPr/>
-              <a:t>23/11/2021</a:t>
+              <a:t>31/07/2025</a:t>
             </a:fld>
             <a:endParaRPr lang="es-CO"/>
           </a:p>
@@ -836,7 +836,7 @@
             <a:fld id="{43DF08CB-A55A-40B1-AEFD-F19B3CFD19B5}" type="datetimeFigureOut">
               <a:rPr lang="es-CO" smtClean="0"/>
               <a:pPr/>
-              <a:t>23/11/2021</a:t>
+              <a:t>31/07/2025</a:t>
             </a:fld>
             <a:endParaRPr lang="es-CO"/>
           </a:p>
@@ -1013,7 +1013,7 @@
             <a:fld id="{43DF08CB-A55A-40B1-AEFD-F19B3CFD19B5}" type="datetimeFigureOut">
               <a:rPr lang="es-CO" smtClean="0"/>
               <a:pPr/>
-              <a:t>23/11/2021</a:t>
+              <a:t>31/07/2025</a:t>
             </a:fld>
             <a:endParaRPr lang="es-CO"/>
           </a:p>
@@ -1180,7 +1180,7 @@
             <a:fld id="{43DF08CB-A55A-40B1-AEFD-F19B3CFD19B5}" type="datetimeFigureOut">
               <a:rPr lang="es-CO" smtClean="0"/>
               <a:pPr/>
-              <a:t>23/11/2021</a:t>
+              <a:t>31/07/2025</a:t>
             </a:fld>
             <a:endParaRPr lang="es-CO"/>
           </a:p>
@@ -1423,7 +1423,7 @@
             <a:fld id="{43DF08CB-A55A-40B1-AEFD-F19B3CFD19B5}" type="datetimeFigureOut">
               <a:rPr lang="es-CO" smtClean="0"/>
               <a:pPr/>
-              <a:t>23/11/2021</a:t>
+              <a:t>31/07/2025</a:t>
             </a:fld>
             <a:endParaRPr lang="es-CO"/>
           </a:p>
@@ -1708,7 +1708,7 @@
             <a:fld id="{43DF08CB-A55A-40B1-AEFD-F19B3CFD19B5}" type="datetimeFigureOut">
               <a:rPr lang="es-CO" smtClean="0"/>
               <a:pPr/>
-              <a:t>23/11/2021</a:t>
+              <a:t>31/07/2025</a:t>
             </a:fld>
             <a:endParaRPr lang="es-CO"/>
           </a:p>
@@ -2127,7 +2127,7 @@
             <a:fld id="{43DF08CB-A55A-40B1-AEFD-F19B3CFD19B5}" type="datetimeFigureOut">
               <a:rPr lang="es-CO" smtClean="0"/>
               <a:pPr/>
-              <a:t>23/11/2021</a:t>
+              <a:t>31/07/2025</a:t>
             </a:fld>
             <a:endParaRPr lang="es-CO"/>
           </a:p>
@@ -2242,7 +2242,7 @@
             <a:fld id="{43DF08CB-A55A-40B1-AEFD-F19B3CFD19B5}" type="datetimeFigureOut">
               <a:rPr lang="es-CO" smtClean="0"/>
               <a:pPr/>
-              <a:t>23/11/2021</a:t>
+              <a:t>31/07/2025</a:t>
             </a:fld>
             <a:endParaRPr lang="es-CO"/>
           </a:p>
@@ -2334,7 +2334,7 @@
             <a:fld id="{43DF08CB-A55A-40B1-AEFD-F19B3CFD19B5}" type="datetimeFigureOut">
               <a:rPr lang="es-CO" smtClean="0"/>
               <a:pPr/>
-              <a:t>23/11/2021</a:t>
+              <a:t>31/07/2025</a:t>
             </a:fld>
             <a:endParaRPr lang="es-CO"/>
           </a:p>
@@ -2608,7 +2608,7 @@
             <a:fld id="{43DF08CB-A55A-40B1-AEFD-F19B3CFD19B5}" type="datetimeFigureOut">
               <a:rPr lang="es-CO" smtClean="0"/>
               <a:pPr/>
-              <a:t>23/11/2021</a:t>
+              <a:t>31/07/2025</a:t>
             </a:fld>
             <a:endParaRPr lang="es-CO"/>
           </a:p>
@@ -2858,7 +2858,7 @@
             <a:fld id="{43DF08CB-A55A-40B1-AEFD-F19B3CFD19B5}" type="datetimeFigureOut">
               <a:rPr lang="es-CO" smtClean="0"/>
               <a:pPr/>
-              <a:t>23/11/2021</a:t>
+              <a:t>31/07/2025</a:t>
             </a:fld>
             <a:endParaRPr lang="es-CO"/>
           </a:p>
@@ -3071,7 +3071,7 @@
             <a:fld id="{43DF08CB-A55A-40B1-AEFD-F19B3CFD19B5}" type="datetimeFigureOut">
               <a:rPr lang="es-CO" smtClean="0"/>
               <a:pPr/>
-              <a:t>23/11/2021</a:t>
+              <a:t>31/07/2025</a:t>
             </a:fld>
             <a:endParaRPr lang="es-CO"/>
           </a:p>
@@ -3700,7 +3700,7 @@
                 <a:latin typeface="Segoe UI Light" panose="020B0502040204020203" pitchFamily="34" charset="0"/>
                 <a:cs typeface="Segoe UI Light" panose="020B0502040204020203" pitchFamily="34" charset="0"/>
               </a:rPr>
-              <a:t>v.20200505</a:t>
+              <a:t>v.20250731</a:t>
             </a:r>
             <a:endParaRPr lang="es-CO" sz="800" spc="100" dirty="0">
               <a:solidFill>
@@ -3924,21 +3924,7 @@
                 <a:latin typeface="Segoe UI Light" panose="020B0502040204020203" pitchFamily="34" charset="0"/>
                 <a:cs typeface="Segoe UI Light" panose="020B0502040204020203" pitchFamily="34" charset="0"/>
               </a:rPr>
-              <a:t>Autodesk </a:t>
-            </a:r>
-            <a:r>
-              <a:rPr lang="es-ES" sz="1600" dirty="0" err="1">
-                <a:latin typeface="Segoe UI Light" panose="020B0502040204020203" pitchFamily="34" charset="0"/>
-                <a:cs typeface="Segoe UI Light" panose="020B0502040204020203" pitchFamily="34" charset="0"/>
-              </a:rPr>
-              <a:t>Autocad</a:t>
-            </a:r>
-            <a:r>
-              <a:rPr lang="es-ES" sz="1600" dirty="0">
-                <a:latin typeface="Segoe UI Light" panose="020B0502040204020203" pitchFamily="34" charset="0"/>
-                <a:cs typeface="Segoe UI Light" panose="020B0502040204020203" pitchFamily="34" charset="0"/>
-              </a:rPr>
-              <a:t> ® 2007.</a:t>
+              <a:t>Autodesk AutoCAD®.</a:t>
             </a:r>
           </a:p>
           <a:p>
@@ -3955,7 +3941,7 @@
                 <a:latin typeface="Segoe UI Light" panose="020B0502040204020203" pitchFamily="34" charset="0"/>
                 <a:cs typeface="Segoe UI Light" panose="020B0502040204020203" pitchFamily="34" charset="0"/>
               </a:rPr>
-              <a:t>Autodesk Civil ®3D.</a:t>
+              <a:t>Autodesk Civil 3D ®.</a:t>
             </a:r>
           </a:p>
         </p:txBody>
@@ -4047,7 +4033,7 @@
         </p:blipFill>
         <p:spPr>
           <a:xfrm>
-            <a:off x="1523492" y="2917612"/>
+            <a:off x="1243442" y="2682705"/>
             <a:ext cx="4320480" cy="2647949"/>
           </a:xfrm>
           <a:prstGeom prst="rect">
@@ -4105,8 +4091,8 @@
         </p:nvSpPr>
         <p:spPr>
           <a:xfrm>
-            <a:off x="1451484" y="1484784"/>
-            <a:ext cx="4392488" cy="1323439"/>
+            <a:off x="407368" y="1196878"/>
+            <a:ext cx="6048672" cy="1323439"/>
           </a:xfrm>
           <a:prstGeom prst="rect">
             <a:avLst/>
@@ -4119,13 +4105,54 @@
           </a:bodyPr>
           <a:lstStyle/>
           <a:p>
-            <a:pPr algn="just"/>
             <a:r>
               <a:rPr lang="es-CO" sz="1600" dirty="0">
                 <a:latin typeface="Segoe UI Light" panose="020B0502040204020203" pitchFamily="34" charset="0"/>
                 <a:cs typeface="Segoe UI Light" panose="020B0502040204020203" pitchFamily="34" charset="0"/>
               </a:rPr>
-              <a:t>1. Partiendo del archivo en el cual se generó el MDT para la planicie importar los elementos 3D que componen el canal y que fueron generados al momento de trazar los respectivos corredores para el valle y cauce sinuoso.</a:t>
+              <a:t>1. A partir del archivo </a:t>
+            </a:r>
+            <a:r>
+              <a:rPr lang="es-CO" sz="1600" i="1" dirty="0">
+                <a:latin typeface="Segoe UI Light" panose="020B0502040204020203" pitchFamily="34" charset="0"/>
+                <a:cs typeface="Segoe UI Light" panose="020B0502040204020203" pitchFamily="34" charset="0"/>
+              </a:rPr>
+              <a:t>/</a:t>
+            </a:r>
+            <a:r>
+              <a:rPr lang="es-CO" sz="1600" i="1" dirty="0" err="1">
+                <a:latin typeface="Segoe UI Light" panose="020B0502040204020203" pitchFamily="34" charset="0"/>
+                <a:cs typeface="Segoe UI Light" panose="020B0502040204020203" pitchFamily="34" charset="0"/>
+              </a:rPr>
+              <a:t>cad</a:t>
+            </a:r>
+            <a:r>
+              <a:rPr lang="es-CO" sz="1600" i="1" dirty="0">
+                <a:latin typeface="Segoe UI Light" panose="020B0502040204020203" pitchFamily="34" charset="0"/>
+                <a:cs typeface="Segoe UI Light" panose="020B0502040204020203" pitchFamily="34" charset="0"/>
+              </a:rPr>
+              <a:t>/civil/Civil3D_MDT_Planicie_v1.dwg</a:t>
+            </a:r>
+            <a:r>
+              <a:rPr lang="es-CO" sz="1600" dirty="0">
+                <a:latin typeface="Segoe UI Light" panose="020B0502040204020203" pitchFamily="34" charset="0"/>
+                <a:cs typeface="Segoe UI Light" panose="020B0502040204020203" pitchFamily="34" charset="0"/>
+              </a:rPr>
+              <a:t> en el cual se generó el MDT para la planicie, importar los elementos 3D contenidos que componen el canal y que fueron generados al momento de trazar los respectivos corredores para el valle y cauce sinuoso. Guardar como /</a:t>
+            </a:r>
+            <a:r>
+              <a:rPr lang="es-CO" sz="1600" dirty="0" err="1">
+                <a:latin typeface="Segoe UI Light" panose="020B0502040204020203" pitchFamily="34" charset="0"/>
+                <a:cs typeface="Segoe UI Light" panose="020B0502040204020203" pitchFamily="34" charset="0"/>
+              </a:rPr>
+              <a:t>cad</a:t>
+            </a:r>
+            <a:r>
+              <a:rPr lang="es-CO" sz="1600" dirty="0">
+                <a:latin typeface="Segoe UI Light" panose="020B0502040204020203" pitchFamily="34" charset="0"/>
+                <a:cs typeface="Segoe UI Light" panose="020B0502040204020203" pitchFamily="34" charset="0"/>
+              </a:rPr>
+              <a:t>/civil/Civil3D_MDT_PlanicieCanal_v1.dwg.</a:t>
             </a:r>
           </a:p>
         </p:txBody>
@@ -4144,8 +4171,8 @@
         </p:nvSpPr>
         <p:spPr>
           <a:xfrm>
-            <a:off x="6681572" y="1565097"/>
-            <a:ext cx="4140967" cy="584775"/>
+            <a:off x="6681572" y="1203355"/>
+            <a:ext cx="5319084" cy="830997"/>
           </a:xfrm>
           <a:prstGeom prst="rect">
             <a:avLst/>
@@ -4164,7 +4191,35 @@
                 <a:latin typeface="Segoe UI Light" panose="020B0502040204020203" pitchFamily="34" charset="0"/>
                 <a:cs typeface="Segoe UI Light" panose="020B0502040204020203" pitchFamily="34" charset="0"/>
               </a:rPr>
-              <a:t>2. Añadir todas las líneas definidas para el canal, y generar la superficie.</a:t>
+              <a:t>2. Desde el archivo /</a:t>
+            </a:r>
+            <a:r>
+              <a:rPr lang="es-CO" sz="1600" dirty="0" err="1">
+                <a:latin typeface="Segoe UI Light" panose="020B0502040204020203" pitchFamily="34" charset="0"/>
+                <a:cs typeface="Segoe UI Light" panose="020B0502040204020203" pitchFamily="34" charset="0"/>
+              </a:rPr>
+              <a:t>cad</a:t>
+            </a:r>
+            <a:r>
+              <a:rPr lang="es-CO" sz="1600" dirty="0">
+                <a:latin typeface="Segoe UI Light" panose="020B0502040204020203" pitchFamily="34" charset="0"/>
+                <a:cs typeface="Segoe UI Light" panose="020B0502040204020203" pitchFamily="34" charset="0"/>
+              </a:rPr>
+              <a:t>/</a:t>
+            </a:r>
+            <a:r>
+              <a:rPr lang="es-CO" sz="1600" dirty="0" err="1">
+                <a:latin typeface="Segoe UI Light" panose="020B0502040204020203" pitchFamily="34" charset="0"/>
+                <a:cs typeface="Segoe UI Light" panose="020B0502040204020203" pitchFamily="34" charset="0"/>
+              </a:rPr>
+              <a:t>acad</a:t>
+            </a:r>
+            <a:r>
+              <a:rPr lang="es-CO" sz="1600" dirty="0">
+                <a:latin typeface="Segoe UI Light" panose="020B0502040204020203" pitchFamily="34" charset="0"/>
+                <a:cs typeface="Segoe UI Light" panose="020B0502040204020203" pitchFamily="34" charset="0"/>
+              </a:rPr>
+              <a:t>/Civil3D_MDT_ValleRio_v0.dwg,  añadir todas las líneas definidas para el canal y generar la superficie.</a:t>
             </a:r>
           </a:p>
         </p:txBody>
@@ -4183,8 +4238,8 @@
         </p:nvSpPr>
         <p:spPr>
           <a:xfrm>
-            <a:off x="6681572" y="3645024"/>
-            <a:ext cx="4248472" cy="1323439"/>
+            <a:off x="6681572" y="3767554"/>
+            <a:ext cx="5319084" cy="1077218"/>
           </a:xfrm>
           <a:prstGeom prst="rect">
             <a:avLst/>
@@ -4230,7 +4285,7 @@
         </p:blipFill>
         <p:spPr>
           <a:xfrm>
-            <a:off x="2672600" y="4308026"/>
+            <a:off x="407368" y="4415626"/>
             <a:ext cx="2831373" cy="2145310"/>
           </a:xfrm>
           <a:prstGeom prst="rect">
@@ -4259,7 +4314,7 @@
         </p:blipFill>
         <p:spPr>
           <a:xfrm>
-            <a:off x="6681572" y="2286987"/>
+            <a:off x="7216878" y="2129627"/>
             <a:ext cx="4248472" cy="1277887"/>
           </a:xfrm>
           <a:prstGeom prst="rect">
@@ -4288,7 +4343,7 @@
         </p:blipFill>
         <p:spPr>
           <a:xfrm>
-            <a:off x="6688028" y="5119270"/>
+            <a:off x="7128586" y="5097784"/>
             <a:ext cx="4425055" cy="974026"/>
           </a:xfrm>
           <a:prstGeom prst="rect">
@@ -4310,7 +4365,7 @@
         </p:nvSpPr>
         <p:spPr>
           <a:xfrm>
-            <a:off x="0" y="714182"/>
+            <a:off x="0" y="548680"/>
             <a:ext cx="12192000" cy="369332"/>
           </a:xfrm>
           <a:prstGeom prst="rect">
@@ -4415,8 +4470,8 @@
         </p:nvSpPr>
         <p:spPr>
           <a:xfrm>
-            <a:off x="1213532" y="1340768"/>
-            <a:ext cx="4666444" cy="1569660"/>
+            <a:off x="652358" y="1247274"/>
+            <a:ext cx="5184576" cy="1569660"/>
           </a:xfrm>
           <a:prstGeom prst="rect">
             <a:avLst/>
@@ -4435,7 +4490,7 @@
                 <a:latin typeface="Segoe UI Light" panose="020B0502040204020203" pitchFamily="34" charset="0"/>
                 <a:cs typeface="Segoe UI Light" panose="020B0502040204020203" pitchFamily="34" charset="0"/>
               </a:rPr>
-              <a:t>1. Para definirá las sección transversal se parte de las líneas utilizadas para la elaboración del Modelo en HEC-RAS.  El cálculo del volumen será más preciso si se definen secciones transversales en un delta en x pequeño, sin embargo, demasiadas secciones hacen que el programa se torne lento.</a:t>
+              <a:t>1. Para definir las secciones transversales, se parte de las líneas utilizadas para la elaboración del modelo de muestreo en HEC-RAS.  El cálculo del volumen será más preciso si se definen secciones transversales en un delta en x pequeño, sin embargo, demasiadas secciones hacen que el programa se torne lento.</a:t>
             </a:r>
           </a:p>
         </p:txBody>
@@ -4454,7 +4509,7 @@
         </p:nvSpPr>
         <p:spPr>
           <a:xfrm>
-            <a:off x="6846485" y="1268760"/>
+            <a:off x="6846485" y="1247274"/>
             <a:ext cx="3858027" cy="830997"/>
           </a:xfrm>
           <a:prstGeom prst="rect">
@@ -4481,7 +4536,7 @@
                 <a:latin typeface="Segoe UI Light" panose="020B0502040204020203" pitchFamily="34" charset="0"/>
                 <a:cs typeface="Segoe UI Light" panose="020B0502040204020203" pitchFamily="34" charset="0"/>
               </a:rPr>
-              <a:t>sample</a:t>
+              <a:t>Sample</a:t>
             </a:r>
             <a:r>
               <a:rPr lang="es-CO" sz="1600" dirty="0">
@@ -4495,7 +4550,7 @@
                 <a:latin typeface="Segoe UI Light" panose="020B0502040204020203" pitchFamily="34" charset="0"/>
                 <a:cs typeface="Segoe UI Light" panose="020B0502040204020203" pitchFamily="34" charset="0"/>
               </a:rPr>
-              <a:t>lines</a:t>
+              <a:t>Lines</a:t>
             </a:r>
             <a:r>
               <a:rPr lang="es-CO" sz="1600" dirty="0">
@@ -4521,7 +4576,7 @@
         </p:nvSpPr>
         <p:spPr>
           <a:xfrm>
-            <a:off x="6744072" y="4013302"/>
+            <a:off x="6744072" y="3991816"/>
             <a:ext cx="3858027" cy="1077218"/>
           </a:xfrm>
           <a:prstGeom prst="rect">
@@ -4566,8 +4621,8 @@
         </p:blipFill>
         <p:spPr>
           <a:xfrm>
-            <a:off x="1199456" y="2996952"/>
-            <a:ext cx="4522428" cy="2088079"/>
+            <a:off x="767408" y="3119482"/>
+            <a:ext cx="5069526" cy="2340684"/>
           </a:xfrm>
           <a:prstGeom prst="rect">
             <a:avLst/>
@@ -4595,7 +4650,7 @@
         </p:blipFill>
         <p:spPr>
           <a:xfrm>
-            <a:off x="6727667" y="5119273"/>
+            <a:off x="6727667" y="5097787"/>
             <a:ext cx="4048853" cy="1406071"/>
           </a:xfrm>
           <a:prstGeom prst="rect">
@@ -4624,7 +4679,7 @@
         </p:blipFill>
         <p:spPr>
           <a:xfrm>
-            <a:off x="6777443" y="2098643"/>
+            <a:off x="6777443" y="2077157"/>
             <a:ext cx="3999077" cy="1656184"/>
           </a:xfrm>
           <a:prstGeom prst="rect">
@@ -4646,7 +4701,7 @@
         </p:nvSpPr>
         <p:spPr>
           <a:xfrm>
-            <a:off x="0" y="714182"/>
+            <a:off x="0" y="692696"/>
             <a:ext cx="12192000" cy="369332"/>
           </a:xfrm>
           <a:prstGeom prst="rect">
@@ -4877,14 +4932,14 @@
                 <a:latin typeface="Segoe UI Light" panose="020B0502040204020203" pitchFamily="34" charset="0"/>
                 <a:cs typeface="Segoe UI Light" panose="020B0502040204020203" pitchFamily="34" charset="0"/>
               </a:rPr>
-              <a:t>1. En la pestaña de análisis seleccionar calcular materiales (compute </a:t>
+              <a:t>1. En la pestaña de análisis seleccionar calcular materiales (Compute </a:t>
             </a:r>
             <a:r>
               <a:rPr lang="es-CO" sz="1600" dirty="0" err="1">
                 <a:latin typeface="Segoe UI Light" panose="020B0502040204020203" pitchFamily="34" charset="0"/>
                 <a:cs typeface="Segoe UI Light" panose="020B0502040204020203" pitchFamily="34" charset="0"/>
               </a:rPr>
-              <a:t>materials</a:t>
+              <a:t>Materials</a:t>
             </a:r>
             <a:r>
               <a:rPr lang="es-CO" sz="1600" dirty="0">

--- a/activity/M02A08/M02A08.pptx
+++ b/activity/M02A08/M02A08.pptx
@@ -4471,7 +4471,7 @@
         <p:spPr>
           <a:xfrm>
             <a:off x="652358" y="1247274"/>
-            <a:ext cx="5184576" cy="1569660"/>
+            <a:ext cx="5184576" cy="2308324"/>
           </a:xfrm>
           <a:prstGeom prst="rect">
             <a:avLst/>
@@ -4490,7 +4490,7 @@
                 <a:latin typeface="Segoe UI Light" panose="020B0502040204020203" pitchFamily="34" charset="0"/>
                 <a:cs typeface="Segoe UI Light" panose="020B0502040204020203" pitchFamily="34" charset="0"/>
               </a:rPr>
-              <a:t>1. Para definir las secciones transversales, se parte de las líneas utilizadas para la elaboración del modelo de muestreo en HEC-RAS.  El cálculo del volumen será más preciso si se definen secciones transversales en un delta en x pequeño, sin embargo, demasiadas secciones hacen que el programa se torne lento.</a:t>
+              <a:t>1. Para definir las secciones transversales, se pueden tomar como referencia las líneas utilizadas para la elaboración del modelo de muestreo en HEC-RAS y luego generar líneas de muestreo en Autodesk Civil 3D, en la mitad de cada curva y en la mitad de las entre tangencias. El cálculo del volumen será más preciso si se definen secciones transversales en un delta en x pequeño, sin embargo, demasiadas secciones hacen que el programa se torne lento.</a:t>
             </a:r>
           </a:p>
         </p:txBody>
@@ -4621,7 +4621,7 @@
         </p:blipFill>
         <p:spPr>
           <a:xfrm>
-            <a:off x="767408" y="3119482"/>
+            <a:off x="709883" y="3815528"/>
             <a:ext cx="5069526" cy="2340684"/>
           </a:xfrm>
           <a:prstGeom prst="rect">

--- a/activity/M02A08/M02A08.pptx
+++ b/activity/M02A08/M02A08.pptx
@@ -216,7 +216,7 @@
             <a:fld id="{53CE91DE-ABC6-4D22-89A0-1765B629FB43}" type="datetimeFigureOut">
               <a:rPr lang="es-CO" smtClean="0"/>
               <a:pPr/>
-              <a:t>31/07/2025</a:t>
+              <a:t>21/11/2025</a:t>
             </a:fld>
             <a:endParaRPr lang="es-CO"/>
           </a:p>
@@ -669,7 +669,7 @@
             <a:fld id="{43DF08CB-A55A-40B1-AEFD-F19B3CFD19B5}" type="datetimeFigureOut">
               <a:rPr lang="es-CO" smtClean="0"/>
               <a:pPr/>
-              <a:t>31/07/2025</a:t>
+              <a:t>21/11/2025</a:t>
             </a:fld>
             <a:endParaRPr lang="es-CO"/>
           </a:p>
@@ -836,7 +836,7 @@
             <a:fld id="{43DF08CB-A55A-40B1-AEFD-F19B3CFD19B5}" type="datetimeFigureOut">
               <a:rPr lang="es-CO" smtClean="0"/>
               <a:pPr/>
-              <a:t>31/07/2025</a:t>
+              <a:t>21/11/2025</a:t>
             </a:fld>
             <a:endParaRPr lang="es-CO"/>
           </a:p>
@@ -1013,7 +1013,7 @@
             <a:fld id="{43DF08CB-A55A-40B1-AEFD-F19B3CFD19B5}" type="datetimeFigureOut">
               <a:rPr lang="es-CO" smtClean="0"/>
               <a:pPr/>
-              <a:t>31/07/2025</a:t>
+              <a:t>21/11/2025</a:t>
             </a:fld>
             <a:endParaRPr lang="es-CO"/>
           </a:p>
@@ -1180,7 +1180,7 @@
             <a:fld id="{43DF08CB-A55A-40B1-AEFD-F19B3CFD19B5}" type="datetimeFigureOut">
               <a:rPr lang="es-CO" smtClean="0"/>
               <a:pPr/>
-              <a:t>31/07/2025</a:t>
+              <a:t>21/11/2025</a:t>
             </a:fld>
             <a:endParaRPr lang="es-CO"/>
           </a:p>
@@ -1423,7 +1423,7 @@
             <a:fld id="{43DF08CB-A55A-40B1-AEFD-F19B3CFD19B5}" type="datetimeFigureOut">
               <a:rPr lang="es-CO" smtClean="0"/>
               <a:pPr/>
-              <a:t>31/07/2025</a:t>
+              <a:t>21/11/2025</a:t>
             </a:fld>
             <a:endParaRPr lang="es-CO"/>
           </a:p>
@@ -1708,7 +1708,7 @@
             <a:fld id="{43DF08CB-A55A-40B1-AEFD-F19B3CFD19B5}" type="datetimeFigureOut">
               <a:rPr lang="es-CO" smtClean="0"/>
               <a:pPr/>
-              <a:t>31/07/2025</a:t>
+              <a:t>21/11/2025</a:t>
             </a:fld>
             <a:endParaRPr lang="es-CO"/>
           </a:p>
@@ -2127,7 +2127,7 @@
             <a:fld id="{43DF08CB-A55A-40B1-AEFD-F19B3CFD19B5}" type="datetimeFigureOut">
               <a:rPr lang="es-CO" smtClean="0"/>
               <a:pPr/>
-              <a:t>31/07/2025</a:t>
+              <a:t>21/11/2025</a:t>
             </a:fld>
             <a:endParaRPr lang="es-CO"/>
           </a:p>
@@ -2242,7 +2242,7 @@
             <a:fld id="{43DF08CB-A55A-40B1-AEFD-F19B3CFD19B5}" type="datetimeFigureOut">
               <a:rPr lang="es-CO" smtClean="0"/>
               <a:pPr/>
-              <a:t>31/07/2025</a:t>
+              <a:t>21/11/2025</a:t>
             </a:fld>
             <a:endParaRPr lang="es-CO"/>
           </a:p>
@@ -2334,7 +2334,7 @@
             <a:fld id="{43DF08CB-A55A-40B1-AEFD-F19B3CFD19B5}" type="datetimeFigureOut">
               <a:rPr lang="es-CO" smtClean="0"/>
               <a:pPr/>
-              <a:t>31/07/2025</a:t>
+              <a:t>21/11/2025</a:t>
             </a:fld>
             <a:endParaRPr lang="es-CO"/>
           </a:p>
@@ -2608,7 +2608,7 @@
             <a:fld id="{43DF08CB-A55A-40B1-AEFD-F19B3CFD19B5}" type="datetimeFigureOut">
               <a:rPr lang="es-CO" smtClean="0"/>
               <a:pPr/>
-              <a:t>31/07/2025</a:t>
+              <a:t>21/11/2025</a:t>
             </a:fld>
             <a:endParaRPr lang="es-CO"/>
           </a:p>
@@ -2858,7 +2858,7 @@
             <a:fld id="{43DF08CB-A55A-40B1-AEFD-F19B3CFD19B5}" type="datetimeFigureOut">
               <a:rPr lang="es-CO" smtClean="0"/>
               <a:pPr/>
-              <a:t>31/07/2025</a:t>
+              <a:t>21/11/2025</a:t>
             </a:fld>
             <a:endParaRPr lang="es-CO"/>
           </a:p>
@@ -3071,7 +3071,7 @@
             <a:fld id="{43DF08CB-A55A-40B1-AEFD-F19B3CFD19B5}" type="datetimeFigureOut">
               <a:rPr lang="es-CO" smtClean="0"/>
               <a:pPr/>
-              <a:t>31/07/2025</a:t>
+              <a:t>21/11/2025</a:t>
             </a:fld>
             <a:endParaRPr lang="es-CO"/>
           </a:p>
